--- a/slides/mapreduce/mapreduce_by_Mahmoud_Parsian/01_understanding_parallelism.pptx
+++ b/slides/mapreduce/mapreduce_by_Mahmoud_Parsian/01_understanding_parallelism.pptx
@@ -6660,7 +6660,7 @@
             </a:br>
             <a:r>
               <a:rPr lang="en-US" dirty="0"/>
-              <a:t>Parallelism &amp;</a:t>
+              <a:t>Parallelism &amp; </a:t>
             </a:r>
             <a:br>
               <a:rPr lang="en-US" dirty="0"/>
@@ -6674,7 +6674,7 @@
             </a:br>
             <a:r>
               <a:rPr lang="en-US" sz="2700" dirty="0"/>
-              <a:t>(informal introduction)</a:t>
+              <a:t> (informal introduction)</a:t>
             </a:r>
             <a:endParaRPr lang="en-US" dirty="0"/>
           </a:p>
@@ -6714,7 +6714,7 @@
                   <a:srgbClr val="002060"/>
                 </a:solidFill>
               </a:rPr>
-              <a:t>Mahmoud (Max) Parsian</a:t>
+              <a:t>Mahmoud Parsian</a:t>
             </a:r>
           </a:p>
           <a:p>
@@ -6829,7 +6829,7 @@
                   <a:srgbClr val="00B050"/>
                 </a:solidFill>
               </a:rPr>
-              <a:t>What if  </a:t>
+              <a:t>What if </a:t>
             </a:r>
             <a:r>
               <a:rPr lang="en-US" b="1" dirty="0">
@@ -6845,7 +6845,7 @@
                   <a:srgbClr val="00B050"/>
                 </a:solidFill>
               </a:rPr>
-              <a:t>depends on output of  </a:t>
+              <a:t>depend on the output of </a:t>
             </a:r>
             <a:r>
               <a:rPr lang="en-US" b="1" dirty="0">
@@ -7106,7 +7106,7 @@
             <a:pPr algn="l"/>
             <a:r>
               <a:rPr lang="en-US" sz="1400" dirty="0"/>
-              <a:t>(assuming that there is no dependencies between tasks)</a:t>
+              <a:t>(Tasks within each pair are independent, but Task-3 and Task-4 depend on Task-1 and Task-2 completing first)</a:t>
             </a:r>
           </a:p>
           <a:p>
@@ -8065,7 +8065,7 @@
                   <a:schemeClr val="tx1"/>
                 </a:solidFill>
               </a:rPr>
-              <a:t>It is estimated that on average he needs 14 seconds to find the item and put in the shopping cart.</a:t>
+              <a:t>It is estimated that on average he needs 14 seconds to find the item and put it in the shopping cart.</a:t>
             </a:r>
           </a:p>
           <a:p>
@@ -8085,7 +8085,7 @@
                 <a:latin typeface="Consolas" panose="020B0609020204030204" pitchFamily="49" charset="0"/>
                 <a:cs typeface="Consolas" panose="020B0609020204030204" pitchFamily="49" charset="0"/>
               </a:rPr>
-              <a:t>	1000 x 14 = 14,000 seconds = 234 minutes</a:t>
+              <a:t>	1000 x 14 = 14,000 seconds = 233 minutes</a:t>
             </a:r>
           </a:p>
           <a:p>
@@ -8104,7 +8104,7 @@
             </a:r>
             <a:r>
               <a:rPr lang="en-US" sz="2800" b="1" dirty="0"/>
-              <a:t>234 minutes </a:t>
+              <a:t>233 minutes </a:t>
             </a:r>
             <a:r>
               <a:rPr lang="en-US" sz="2800" dirty="0">
@@ -8186,14 +8186,14 @@
           <a:p>
             <a:r>
               <a:rPr lang="en-US" dirty="0"/>
-              <a:t>Processing Data? One Executor: Alex</a:t>
+              <a:t>Processing Data? One Executor: Alex. </a:t>
             </a:r>
             <a:br>
               <a:rPr lang="en-US" dirty="0"/>
             </a:br>
             <a:r>
               <a:rPr lang="en-US" dirty="0"/>
-              <a:t>Buy item-1, then item-2, …, then item-1000, …</a:t>
+              <a:t>Buy item-1, then item-2, …, then item-1000, … </a:t>
             </a:r>
             <a:br>
               <a:rPr lang="en-US" dirty="0"/>
@@ -8608,7 +8608,7 @@
             </a:r>
             <a:r>
               <a:rPr lang="en-US" sz="2800" b="1" dirty="0"/>
-              <a:t>234 minutes </a:t>
+              <a:t>233 minutes </a:t>
             </a:r>
             <a:r>
               <a:rPr lang="en-US" sz="2800" dirty="0"/>
@@ -8681,7 +8681,7 @@
                 <a:latin typeface="Consolas" panose="020B0609020204030204" pitchFamily="49" charset="0"/>
                 <a:cs typeface="Consolas" panose="020B0609020204030204" pitchFamily="49" charset="0"/>
               </a:rPr>
-              <a:t>100 x 14 = 1400 seconds = 24 minutes</a:t>
+              <a:t>100 x 14 = 1400 seconds = 23 minutes</a:t>
             </a:r>
           </a:p>
           <a:p>
@@ -8703,7 +8703,7 @@
                   <a:srgbClr val="002060"/>
                 </a:solidFill>
               </a:rPr>
-              <a:t>234 minutes </a:t>
+              <a:t>233 minutes </a:t>
             </a:r>
             <a:r>
               <a:rPr lang="en-US" sz="2800" dirty="0">
@@ -8719,7 +8719,7 @@
                   <a:srgbClr val="002060"/>
                 </a:solidFill>
               </a:rPr>
-              <a:t>24 minutes</a:t>
+              <a:t>23 minutes</a:t>
             </a:r>
           </a:p>
           <a:p>
@@ -8817,7 +8817,7 @@
           <a:p>
             <a:r>
               <a:rPr lang="en-US" dirty="0"/>
-              <a:t>Processing Data? 10 parallel executors</a:t>
+              <a:t>Processing Data? 10 parallel executors. </a:t>
             </a:r>
             <a:br>
               <a:rPr lang="en-US" dirty="0"/>
@@ -10010,7 +10010,7 @@
                   <a:srgbClr val="0070C0"/>
                 </a:solidFill>
               </a:rPr>
-              <a:t>and can not spend 24 minutes for shopping.</a:t>
+              <a:t>and can not spend 23 minutes for shopping.</a:t>
             </a:r>
           </a:p>
           <a:p>
@@ -10038,7 +10038,7 @@
             <a:pPr algn="l"/>
             <a:r>
               <a:rPr lang="en-US" sz="2800" dirty="0"/>
-              <a:t>      they will do shopping and deliver to Alex.</a:t>
+              <a:t>they will do shopping and deliver to Alex.</a:t>
             </a:r>
           </a:p>
           <a:p>
@@ -10076,7 +10076,7 @@
                 <a:latin typeface="Consolas" panose="020B0609020204030204" pitchFamily="49" charset="0"/>
                 <a:cs typeface="Consolas" panose="020B0609020204030204" pitchFamily="49" charset="0"/>
               </a:rPr>
-              <a:t>10 x 14 = 140 seconds = about 3 minutes</a:t>
+              <a:t>10 x 14 = 140 seconds = about 2 minutes</a:t>
             </a:r>
           </a:p>
           <a:p>
@@ -10098,7 +10098,7 @@
                   <a:srgbClr val="002060"/>
                 </a:solidFill>
               </a:rPr>
-              <a:t>234 minutes </a:t>
+              <a:t>233 minutes </a:t>
             </a:r>
             <a:r>
               <a:rPr lang="en-US" sz="2800" dirty="0">
@@ -10114,7 +10114,7 @@
                   <a:srgbClr val="002060"/>
                 </a:solidFill>
               </a:rPr>
-              <a:t>3 minutes</a:t>
+              <a:t>2 minutes</a:t>
             </a:r>
           </a:p>
           <a:p>
@@ -10212,7 +10212,7 @@
           <a:p>
             <a:r>
               <a:rPr lang="en-US" dirty="0"/>
-              <a:t>Processing Data? 100 parallel executors</a:t>
+              <a:t>Processing Data? 100 parallel executors. </a:t>
             </a:r>
             <a:br>
               <a:rPr lang="en-US" dirty="0"/>
@@ -11397,7 +11397,7 @@
                   <a:schemeClr val="tx1"/>
                 </a:solidFill>
               </a:rPr>
-              <a:t>Parallelism and Partitioning are  foundations of big data solutions.</a:t>
+              <a:t>Parallelism and Partitioning are foundations of big data solutions.</a:t>
             </a:r>
           </a:p>
           <a:p>
@@ -11502,7 +11502,7 @@
             </a:pPr>
             <a:r>
               <a:rPr lang="en-US" sz="2800" dirty="0"/>
-              <a:t>each of them is carried out by one single processor individually. </a:t>
+              <a:t>each of which is carried out independently by its own processor. </a:t>
             </a:r>
           </a:p>
         </p:txBody>
@@ -11955,7 +11955,7 @@
                   <a:srgbClr val="0070C0"/>
                 </a:solidFill>
               </a:rPr>
-              <a:t>and can not even spend 3 minutes for shopping.</a:t>
+              <a:t>and can not even spend 2 minutes for shopping.</a:t>
             </a:r>
           </a:p>
           <a:p>
@@ -12074,7 +12074,7 @@
                 <a:latin typeface="Consolas" panose="020B0609020204030204" pitchFamily="49" charset="0"/>
                 <a:cs typeface="Consolas" panose="020B0609020204030204" pitchFamily="49" charset="0"/>
               </a:rPr>
-              <a:t>234 minutes </a:t>
+              <a:t>233 minutes </a:t>
             </a:r>
             <a:r>
               <a:rPr lang="en-US" dirty="0">
@@ -12186,7 +12186,7 @@
           <a:p>
             <a:r>
               <a:rPr lang="en-US" dirty="0"/>
-              <a:t>Processing Data? 1000 parallel executors</a:t>
+              <a:t>Processing Data? 1000 parallel executors. </a:t>
             </a:r>
             <a:br>
               <a:rPr lang="en-US" dirty="0"/>
@@ -12876,7 +12876,7 @@
               <a:rPr lang="en-US" dirty="0">
                 <a:latin typeface="Arial" charset="0"/>
               </a:rPr>
-              <a:t>Partition various tasks carried out solving the problem among the cores.</a:t>
+              <a:t>Partition the various tasks involved in solving the problem among the cores.</a:t>
             </a:r>
             <a:br>
               <a:rPr lang="en-US" dirty="0">
@@ -12913,19 +12913,7 @@
               <a:rPr lang="en-US" dirty="0">
                 <a:latin typeface="Arial" charset="0"/>
               </a:rPr>
-              <a:t>Each core carries out similar operations on it</a:t>
-            </a:r>
-            <a:r>
-              <a:rPr lang="ja-JP" altLang="en-US">
-                <a:latin typeface="Arial" charset="0"/>
-              </a:rPr>
-              <a:t>’</a:t>
-            </a:r>
-            <a:r>
-              <a:rPr lang="en-US" dirty="0">
-                <a:latin typeface="Arial" charset="0"/>
-              </a:rPr>
-              <a:t>s part of the data.</a:t>
+              <a:t>Each core carries out similar operations on its part of the data.</a:t>
             </a:r>
           </a:p>
         </p:txBody>
@@ -13051,7 +13039,7 @@
               <a:rPr lang="en-US" dirty="0">
                 <a:latin typeface="Arial" charset="0"/>
               </a:rPr>
-              <a:t>Let your data has 200,000,000,000 data points</a:t>
+              <a:t>Suppose your data has 200,000,000,000 data points</a:t>
             </a:r>
           </a:p>
           <a:p>
@@ -13101,7 +13089,7 @@
                 </a:solidFill>
                 <a:latin typeface="Arial" charset="0"/>
               </a:rPr>
-              <a:t>2000,000</a:t>
+              <a:t>2,000,000</a:t>
             </a:r>
           </a:p>
           <a:p>
@@ -13113,7 +13101,7 @@
                 </a:solidFill>
                 <a:latin typeface="Arial" charset="0"/>
               </a:rPr>
-              <a:t>100,000 x 2000,000 = </a:t>
+              <a:t>100,000 x 2,000,000 = </a:t>
             </a:r>
             <a:r>
               <a:rPr lang="en-US" dirty="0">
@@ -13156,7 +13144,7 @@
               <a:rPr lang="en-US" dirty="0">
                 <a:latin typeface="Arial" charset="0"/>
               </a:rPr>
-              <a:t>With these partitioning in place, The fastest way  to execute </a:t>
+              <a:t>With this partitioning in place, the fastest way to execute </a:t>
             </a:r>
             <a:r>
               <a:rPr lang="en-US" dirty="0">
@@ -13165,7 +13153,7 @@
                 </a:solidFill>
                 <a:latin typeface="Arial" charset="0"/>
               </a:rPr>
-              <a:t>map(function)  </a:t>
+              <a:t>map(function) </a:t>
             </a:r>
             <a:r>
               <a:rPr lang="en-US" dirty="0">
@@ -13398,7 +13386,7 @@
                 </a:solidFill>
                 <a:latin typeface="Arial" charset="0"/>
               </a:rPr>
-              <a:t>At most 1000 mappers are executing at a single point of time.</a:t>
+              <a:t>At most 1000 mappers are executing at any single point in time.</a:t>
             </a:r>
           </a:p>
           <a:p>
@@ -13409,7 +13397,7 @@
                 </a:solidFill>
                 <a:latin typeface="Arial" charset="0"/>
               </a:rPr>
-              <a:t>The more mappers we have: </a:t>
+              <a:t>The more mappers we have,</a:t>
             </a:r>
           </a:p>
           <a:p>
@@ -13423,7 +13411,7 @@
                 </a:solidFill>
                 <a:latin typeface="Arial" charset="0"/>
               </a:rPr>
-              <a:t>The more we execute faster</a:t>
+              <a:t>the faster we execute.</a:t>
             </a:r>
           </a:p>
           <a:p>
@@ -13613,7 +13601,7 @@
               <a:rPr lang="en-US" dirty="0">
                 <a:latin typeface="Arial" charset="0"/>
               </a:rPr>
-              <a:t> – because each Executors works at its own pace, make sure Executors do not get too far ahead of the rest.</a:t>
+              <a:t> – because each Executor works at its own pace, make sure Executors do not get too far ahead of the rest.</a:t>
             </a:r>
           </a:p>
           <a:p>
@@ -13632,7 +13620,7 @@
                 </a:solidFill>
                 <a:latin typeface="Arial" charset="0"/>
               </a:rPr>
-              <a:t>NOTE: If you use Spark or MapReduce, then all            </a:t>
+              <a:t>NOTE: If you use Spark or MapReduce, then all </a:t>
             </a:r>
           </a:p>
           <a:p>
@@ -13646,7 +13634,7 @@
                 </a:solidFill>
                 <a:latin typeface="Arial" charset="0"/>
               </a:rPr>
-              <a:t>            of  these are done automagically for you!!!</a:t>
+              <a:t>of these are done automagically for you!</a:t>
             </a:r>
           </a:p>
         </p:txBody>
@@ -13820,7 +13808,7 @@
                   <a:srgbClr val="002060"/>
                 </a:solidFill>
               </a:rPr>
-              <a:t>Size of each partition: 1000,000 records</a:t>
+              <a:t>Size of each partition: 1,000,000 records</a:t>
             </a:r>
           </a:p>
           <a:p>
@@ -13834,7 +13822,7 @@
                   <a:srgbClr val="00B0F0"/>
                 </a:solidFill>
               </a:rPr>
-              <a:t>200,000,000,000 = 200,000 x 1000,000</a:t>
+              <a:t>200,000,000,000 = 200,000 x 1,000,000</a:t>
             </a:r>
           </a:p>
           <a:p>
@@ -13856,7 +13844,7 @@
                   <a:srgbClr val="0070C0"/>
                 </a:solidFill>
               </a:rPr>
-              <a:t>Typically, a chunk (1000,000 records) becomes a unit of parallelism.</a:t>
+              <a:t>Typically, a chunk (1,000,000 records) becomes a unit of parallelism.</a:t>
             </a:r>
           </a:p>
           <a:p>
@@ -13991,7 +13979,7 @@
                   <a:srgbClr val="002060"/>
                 </a:solidFill>
               </a:rPr>
-              <a:t>. The world around us isn't serial and sequential: many things happen at the same time</a:t>
+              <a:t>. The world around us isn't serial and sequential: many things happen at the same time.</a:t>
             </a:r>
           </a:p>
           <a:p>
@@ -14027,7 +14015,7 @@
                   <a:srgbClr val="002060"/>
                 </a:solidFill>
               </a:rPr>
-              <a:t>. By saving time, parallel computing makes things cheaper and faster</a:t>
+              <a:t>. By saving time, parallel computing makes things cheaper and faster.</a:t>
             </a:r>
           </a:p>
           <a:p>
@@ -14041,7 +14029,7 @@
             </a:r>
             <a:r>
               <a:rPr lang="en-US" sz="2800" dirty="0"/>
-              <a:t>  be partitioning them into smaller problems</a:t>
+              <a:t> by partitioning them into smaller problems.</a:t>
             </a:r>
           </a:p>
           <a:p>
@@ -14055,7 +14043,7 @@
                   <a:srgbClr val="002060"/>
                 </a:solidFill>
               </a:rPr>
-              <a:t>Solve Larger Problems in a short point of time.</a:t>
+              <a:t>Solve Larger Problems in a short period of time.</a:t>
             </a:r>
             <a:endParaRPr lang="en-US" sz="3200" b="1" dirty="0">
               <a:solidFill>
@@ -15373,7 +15361,7 @@
                   <a:schemeClr val="tx1"/>
                 </a:solidFill>
               </a:rPr>
-              <a:t> or circumstances happening                              or existing </a:t>
+              <a:t> or circumstances happening or existing </a:t>
             </a:r>
             <a:r>
               <a:rPr lang="en-US" sz="2800" u="sng" dirty="0">
@@ -15433,7 +15421,7 @@
                   <a:schemeClr val="tx1"/>
                 </a:solidFill>
               </a:rPr>
-              <a:t>Example: "a high level of concurrency is crucial to good performance in a multiuser database system”</a:t>
+              <a:t>Example: “a high level of concurrency is crucial to good performance in a multiuser database system”</a:t>
             </a:r>
           </a:p>
           <a:p>
@@ -15914,7 +15902,7 @@
             <a:pPr algn="l"/>
             <a:r>
               <a:rPr lang="en-US" sz="3200" dirty="0"/>
-              <a:t>Task A = { A1, A2, A3, A4},    Task B = {B1, B2, B3}, Task C = {C1, C2}</a:t>
+              <a:t>Task A = {A1, A2, A3, A4}, Task B = {B1, B2, B3}, Task C = {C1, C2}</a:t>
             </a:r>
           </a:p>
           <a:p>
@@ -16216,7 +16204,7 @@
             <a:pPr algn="l"/>
             <a:r>
               <a:rPr lang="en-US" sz="3200" dirty="0"/>
-              <a:t>Task A = { A1, A2, A3, A4}     Task B = {B1, B2, B3}, Task C = {C1, C2}</a:t>
+              <a:t>Task A = {A1, A2, A3, A4}, Task B = {B1, B2, B3}, Task C = {C1, C2}</a:t>
             </a:r>
           </a:p>
           <a:p>
@@ -16268,7 +16256,7 @@
             </a:r>
             <a:r>
               <a:rPr lang="en-US" sz="3200" dirty="0"/>
-              <a:t>   A2   B2   C2 (3 tasks running concurrently)  </a:t>
+              <a:t>   A2   B2   C2 (3 tasks running concurrently)</a:t>
             </a:r>
           </a:p>
           <a:p>
@@ -16277,7 +16265,7 @@
             </a:pPr>
             <a:r>
               <a:rPr lang="en-US" sz="3200" dirty="0"/>
-              <a:t>A3   B3         (2 tasks running concurrently)</a:t>
+              <a:t>3.   A3   B3 (2 tasks running concurrently)</a:t>
             </a:r>
           </a:p>
           <a:p>
@@ -16286,7 +16274,7 @@
             </a:pPr>
             <a:r>
               <a:rPr lang="en-US" sz="3200" dirty="0"/>
-              <a:t>A4                  (1 task running) </a:t>
+              <a:t>4.   A4 (1 task running)</a:t>
             </a:r>
           </a:p>
         </p:txBody>
@@ -16438,14 +16426,14 @@
             <a:pPr algn="l"/>
             <a:r>
               <a:rPr lang="en-US" sz="3200" dirty="0"/>
-              <a:t>Task A = { A1, A2, A3, A4}     </a:t>
+              <a:t>Task A = {A1, A2, A3, A4},</a:t>
             </a:r>
           </a:p>
           <a:p>
             <a:pPr algn="l"/>
             <a:r>
               <a:rPr lang="en-US" sz="3200" dirty="0"/>
-              <a:t>Task B = {B1, B2, B3}, </a:t>
+              <a:t>Task B = {B1, B2, B3},</a:t>
             </a:r>
           </a:p>
           <a:p>
@@ -16696,7 +16684,7 @@
             <a:pPr algn="l"/>
             <a:r>
               <a:rPr lang="en-US" sz="1400" dirty="0"/>
-              <a:t>(assuming that there is no dependencies between tasks)</a:t>
+              <a:t>(assuming that there are no dependencies between tasks)</a:t>
             </a:r>
           </a:p>
           <a:p>
